--- a/documents/IJHPM/regional_anaesthesia_figures_IJHPM_EN.pptx
+++ b/documents/IJHPM/regional_anaesthesia_figures_IJHPM_EN.pptx
@@ -3115,7 +3115,7 @@
               <a:rPr b="1" sz="2200">
                 <a:latin typeface="Arial"/>
               </a:rPr>
-              <a:t>Figure 1. Geographic distribution of anaesthesia standardised claim ratios across 335 secondary medical areas of Japan, fiscal year 2022.</a:t>
+              <a:t>Figure 1. Geographic distribution of anaesthesia standardised claim ratios across 335 secondary medical areas of Japan, fiscal year 2022</a:t>
             </a:r>
           </a:p>
         </p:txBody>
